--- a/claude-code-workshop-4session.pptx
+++ b/claude-code-workshop-4session.pptx
@@ -3853,7 +3853,7 @@
                 </a:solidFill>
                 <a:latin typeface="Segoe UI"/>
               </a:rPr>
-              <a:t>cloud-code-workshop-ui.html — 65 LEs, Slides, Übungen, Quiz, Fortschritt.</a:t>
+              <a:t>claude-code-workshop-ui.html — 65 LEs, Slides, Übungen, Quiz, Fortschritt.</a:t>
             </a:r>
           </a:p>
         </p:txBody>
@@ -8822,7 +8822,7 @@
                 </a:solidFill>
                 <a:latin typeface="Segoe UI"/>
               </a:rPr>
-              <a:t>Interaktives Lern-Cockpit (cloud-code-workshop-ui.html) + Mentor-Agent begleiten das Selbststudium.</a:t>
+              <a:t>Interaktives Lern-Cockpit (claude-code-workshop-ui.html) + Mentor-Agent begleiten das Selbststudium.</a:t>
             </a:r>
           </a:p>
         </p:txBody>
@@ -9606,7 +9606,7 @@
                 </a:solidFill>
                 <a:latin typeface="Segoe UI"/>
               </a:rPr>
-              <a:t>Modellwahl &amp; Effort (Opus 4.8 / Sonnet 5 / Haiku / Fable 5)</a:t>
+              <a:t>Modellwahl &amp; Effort (Tiers: Opus / Sonnet / Haiku / Fable)</a:t>
             </a:r>
           </a:p>
         </p:txBody>
